--- a/lesson_13-fundamentals_of_computer_networks_and_http/lesson_13-fundamentals_of_computer_networks_and_http.pptx
+++ b/lesson_13-fundamentals_of_computer_networks_and_http/lesson_13-fundamentals_of_computer_networks_and_http.pptx
@@ -246,7 +246,7 @@
           <a:p>
             <a:fld id="{B6FBD0CA-8F9C-4380-8AFD-600A0D90DFDA}" type="datetimeFigureOut">
               <a:rPr lang="en-GB" smtClean="0"/>
-              <a:t>10/02/2026</a:t>
+              <a:t>19/02/2026</a:t>
             </a:fld>
             <a:endParaRPr lang="en-GB"/>
           </a:p>
@@ -9603,7 +9603,9 @@
           <a:lstStyle/>
           <a:p>
             <a:pPr algn="ctr"/>
-            <a:endParaRPr lang="en-GB"/>
+            <a:endParaRPr lang="en-GB">
+              <a:latin typeface="Aptos" panose="020B0004020202020204" pitchFamily="34" charset="0"/>
+            </a:endParaRPr>
           </a:p>
         </p:txBody>
       </p:sp>
@@ -9631,12 +9633,12 @@
           <a:p>
             <a:r>
               <a:rPr lang="it-IT" dirty="0">
-                <a:latin typeface="Palatino Linotype" panose="02040502050505030304" pitchFamily="18" charset="0"/>
+                <a:latin typeface="Aptos" panose="020B0004020202020204" pitchFamily="34" charset="0"/>
               </a:rPr>
               <a:t>HTTP/0.9</a:t>
             </a:r>
             <a:endParaRPr lang="en-GB" dirty="0">
-              <a:latin typeface="Palatino Linotype" panose="02040502050505030304" pitchFamily="18" charset="0"/>
+              <a:latin typeface="Aptos" panose="020B0004020202020204" pitchFamily="34" charset="0"/>
             </a:endParaRPr>
           </a:p>
         </p:txBody>
@@ -9665,12 +9667,12 @@
           <a:p>
             <a:r>
               <a:rPr lang="it-IT" dirty="0">
-                <a:latin typeface="Palatino Linotype" panose="02040502050505030304" pitchFamily="18" charset="0"/>
+                <a:latin typeface="Aptos" panose="020B0004020202020204" pitchFamily="34" charset="0"/>
               </a:rPr>
               <a:t>HTTP/1.0</a:t>
             </a:r>
             <a:endParaRPr lang="en-GB" dirty="0">
-              <a:latin typeface="Palatino Linotype" panose="02040502050505030304" pitchFamily="18" charset="0"/>
+              <a:latin typeface="Aptos" panose="020B0004020202020204" pitchFamily="34" charset="0"/>
             </a:endParaRPr>
           </a:p>
         </p:txBody>
@@ -9699,12 +9701,12 @@
           <a:p>
             <a:r>
               <a:rPr lang="it-IT" dirty="0">
-                <a:latin typeface="Palatino Linotype" panose="02040502050505030304" pitchFamily="18" charset="0"/>
+                <a:latin typeface="Aptos" panose="020B0004020202020204" pitchFamily="34" charset="0"/>
               </a:rPr>
               <a:t>HTTP/1.1</a:t>
             </a:r>
             <a:endParaRPr lang="en-GB" dirty="0">
-              <a:latin typeface="Palatino Linotype" panose="02040502050505030304" pitchFamily="18" charset="0"/>
+              <a:latin typeface="Aptos" panose="020B0004020202020204" pitchFamily="34" charset="0"/>
             </a:endParaRPr>
           </a:p>
         </p:txBody>
@@ -9733,12 +9735,12 @@
           <a:p>
             <a:r>
               <a:rPr lang="it-IT" dirty="0">
-                <a:latin typeface="Palatino Linotype" panose="02040502050505030304" pitchFamily="18" charset="0"/>
+                <a:latin typeface="Aptos" panose="020B0004020202020204" pitchFamily="34" charset="0"/>
               </a:rPr>
               <a:t>HTTP/2.0</a:t>
             </a:r>
             <a:endParaRPr lang="en-GB" dirty="0">
-              <a:latin typeface="Palatino Linotype" panose="02040502050505030304" pitchFamily="18" charset="0"/>
+              <a:latin typeface="Aptos" panose="020B0004020202020204" pitchFamily="34" charset="0"/>
             </a:endParaRPr>
           </a:p>
         </p:txBody>
@@ -9767,12 +9769,12 @@
           <a:p>
             <a:r>
               <a:rPr lang="it-IT" dirty="0">
-                <a:latin typeface="Palatino Linotype" panose="02040502050505030304" pitchFamily="18" charset="0"/>
+                <a:latin typeface="Aptos" panose="020B0004020202020204" pitchFamily="34" charset="0"/>
               </a:rPr>
               <a:t>HTTP/3.0</a:t>
             </a:r>
             <a:endParaRPr lang="en-GB" dirty="0">
-              <a:latin typeface="Palatino Linotype" panose="02040502050505030304" pitchFamily="18" charset="0"/>
+              <a:latin typeface="Aptos" panose="020B0004020202020204" pitchFamily="34" charset="0"/>
             </a:endParaRPr>
           </a:p>
         </p:txBody>
@@ -9836,12 +9838,12 @@
           <a:p>
             <a:r>
               <a:rPr lang="it-IT" dirty="0">
-                <a:latin typeface="Palatino Linotype" panose="02040502050505030304" pitchFamily="18" charset="0"/>
+                <a:latin typeface="Aptos" panose="020B0004020202020204" pitchFamily="34" charset="0"/>
               </a:rPr>
               <a:t>1991</a:t>
             </a:r>
             <a:endParaRPr lang="en-GB" dirty="0">
-              <a:latin typeface="Palatino Linotype" panose="02040502050505030304" pitchFamily="18" charset="0"/>
+              <a:latin typeface="Aptos" panose="020B0004020202020204" pitchFamily="34" charset="0"/>
             </a:endParaRPr>
           </a:p>
         </p:txBody>
@@ -9905,12 +9907,12 @@
           <a:p>
             <a:r>
               <a:rPr lang="it-IT" dirty="0">
-                <a:latin typeface="Palatino Linotype" panose="02040502050505030304" pitchFamily="18" charset="0"/>
+                <a:latin typeface="Aptos" panose="020B0004020202020204" pitchFamily="34" charset="0"/>
               </a:rPr>
               <a:t>1996</a:t>
             </a:r>
             <a:endParaRPr lang="en-GB" dirty="0">
-              <a:latin typeface="Palatino Linotype" panose="02040502050505030304" pitchFamily="18" charset="0"/>
+              <a:latin typeface="Aptos" panose="020B0004020202020204" pitchFamily="34" charset="0"/>
             </a:endParaRPr>
           </a:p>
         </p:txBody>
@@ -9976,12 +9978,12 @@
           <a:p>
             <a:r>
               <a:rPr lang="it-IT" dirty="0">
-                <a:latin typeface="Palatino Linotype" panose="02040502050505030304" pitchFamily="18" charset="0"/>
+                <a:latin typeface="Aptos" panose="020B0004020202020204" pitchFamily="34" charset="0"/>
               </a:rPr>
               <a:t>1997</a:t>
             </a:r>
             <a:endParaRPr lang="en-GB" dirty="0">
-              <a:latin typeface="Palatino Linotype" panose="02040502050505030304" pitchFamily="18" charset="0"/>
+              <a:latin typeface="Aptos" panose="020B0004020202020204" pitchFamily="34" charset="0"/>
             </a:endParaRPr>
           </a:p>
         </p:txBody>
@@ -10080,12 +10082,12 @@
           <a:p>
             <a:r>
               <a:rPr lang="it-IT" dirty="0">
-                <a:latin typeface="Palatino Linotype" panose="02040502050505030304" pitchFamily="18" charset="0"/>
+                <a:latin typeface="Aptos" panose="020B0004020202020204" pitchFamily="34" charset="0"/>
               </a:rPr>
               <a:t>2015</a:t>
             </a:r>
             <a:endParaRPr lang="en-GB" dirty="0">
-              <a:latin typeface="Palatino Linotype" panose="02040502050505030304" pitchFamily="18" charset="0"/>
+              <a:latin typeface="Aptos" panose="020B0004020202020204" pitchFamily="34" charset="0"/>
             </a:endParaRPr>
           </a:p>
         </p:txBody>
@@ -10114,12 +10116,12 @@
           <a:p>
             <a:r>
               <a:rPr lang="it-IT" dirty="0">
-                <a:latin typeface="Palatino Linotype" panose="02040502050505030304" pitchFamily="18" charset="0"/>
+                <a:latin typeface="Aptos" panose="020B0004020202020204" pitchFamily="34" charset="0"/>
               </a:rPr>
               <a:t>2020</a:t>
             </a:r>
             <a:endParaRPr lang="en-GB" dirty="0">
-              <a:latin typeface="Palatino Linotype" panose="02040502050505030304" pitchFamily="18" charset="0"/>
+              <a:latin typeface="Aptos" panose="020B0004020202020204" pitchFamily="34" charset="0"/>
             </a:endParaRPr>
           </a:p>
         </p:txBody>
@@ -12678,7 +12680,13 @@
           <p:cNvGraphicFramePr>
             <a:graphicFrameLocks noGrp="1"/>
           </p:cNvGraphicFramePr>
-          <p:nvPr/>
+          <p:nvPr>
+            <p:extLst>
+              <p:ext uri="{D42A27DB-BD31-4B8C-83A1-F6EECF244321}">
+                <p14:modId xmlns:p14="http://schemas.microsoft.com/office/powerpoint/2010/main" val="1650550200"/>
+              </p:ext>
+            </p:extLst>
+          </p:nvPr>
         </p:nvGraphicFramePr>
         <p:xfrm>
           <a:off x="5531459" y="3568033"/>
@@ -12715,7 +12723,7 @@
                       <a:pPr algn="ctr"/>
                       <a:r>
                         <a:rPr lang="en-US" sz="1600" noProof="0" dirty="0">
-                          <a:latin typeface="Palatino Linotype" panose="02040502050505030304" pitchFamily="18" charset="0"/>
+                          <a:latin typeface="Aptos" panose="020B0004020202020204" pitchFamily="34" charset="0"/>
                         </a:rPr>
                         <a:t>Status code</a:t>
                       </a:r>
@@ -12731,7 +12739,7 @@
                       <a:pPr algn="ctr"/>
                       <a:r>
                         <a:rPr lang="en-US" sz="1600" noProof="0" dirty="0">
-                          <a:latin typeface="Palatino Linotype" panose="02040502050505030304" pitchFamily="18" charset="0"/>
+                          <a:latin typeface="Aptos" panose="020B0004020202020204" pitchFamily="34" charset="0"/>
                         </a:rPr>
                         <a:t>Description</a:t>
                       </a:r>
@@ -12753,7 +12761,7 @@
                     <a:p>
                       <a:r>
                         <a:rPr lang="en-US" sz="1600" b="1" noProof="0" dirty="0">
-                          <a:latin typeface="Palatino Linotype" panose="02040502050505030304" pitchFamily="18" charset="0"/>
+                          <a:latin typeface="Aptos" panose="020B0004020202020204" pitchFamily="34" charset="0"/>
                         </a:rPr>
                         <a:t>1xx</a:t>
                       </a:r>
@@ -12767,19 +12775,25 @@
                     <a:lstStyle/>
                     <a:p>
                       <a:r>
+                        <a:rPr lang="en-US" sz="1600" b="1" noProof="0" dirty="0">
+                          <a:latin typeface="Aptos" panose="020B0004020202020204" pitchFamily="34" charset="0"/>
+                        </a:rPr>
+                        <a:t>Informational</a:t>
+                      </a:r>
+                      <a:r>
                         <a:rPr lang="en-US" sz="1600" noProof="0" dirty="0">
-                          <a:latin typeface="Palatino Linotype" panose="02040502050505030304" pitchFamily="18" charset="0"/>
+                          <a:latin typeface="Aptos" panose="020B0004020202020204" pitchFamily="34" charset="0"/>
                         </a:rPr>
-                        <a:t>Informational:</a:t>
+                        <a:t>:</a:t>
                       </a:r>
                       <a:r>
                         <a:rPr lang="en-US" sz="1600" baseline="0" noProof="0" dirty="0">
-                          <a:latin typeface="Palatino Linotype" panose="02040502050505030304" pitchFamily="18" charset="0"/>
+                          <a:latin typeface="Aptos" panose="020B0004020202020204" pitchFamily="34" charset="0"/>
                         </a:rPr>
                         <a:t> the request was received and is being processed,</a:t>
                       </a:r>
                       <a:endParaRPr lang="en-US" sz="1600" noProof="0" dirty="0">
-                        <a:latin typeface="Palatino Linotype" panose="02040502050505030304" pitchFamily="18" charset="0"/>
+                        <a:latin typeface="Aptos" panose="020B0004020202020204" pitchFamily="34" charset="0"/>
                       </a:endParaRPr>
                     </a:p>
                   </a:txBody>
@@ -12799,7 +12813,7 @@
                     <a:p>
                       <a:r>
                         <a:rPr lang="en-US" sz="1600" b="1" noProof="0" dirty="0">
-                          <a:latin typeface="Palatino Linotype" panose="02040502050505030304" pitchFamily="18" charset="0"/>
+                          <a:latin typeface="Aptos" panose="020B0004020202020204" pitchFamily="34" charset="0"/>
                         </a:rPr>
                         <a:t>2xx</a:t>
                       </a:r>
@@ -12813,19 +12827,25 @@
                     <a:lstStyle/>
                     <a:p>
                       <a:r>
+                        <a:rPr lang="en-US" sz="1600" b="1" noProof="0" dirty="0">
+                          <a:latin typeface="Aptos" panose="020B0004020202020204" pitchFamily="34" charset="0"/>
+                        </a:rPr>
+                        <a:t>Successful</a:t>
+                      </a:r>
+                      <a:r>
                         <a:rPr lang="en-US" sz="1600" noProof="0" dirty="0">
-                          <a:latin typeface="Palatino Linotype" panose="02040502050505030304" pitchFamily="18" charset="0"/>
+                          <a:latin typeface="Aptos" panose="020B0004020202020204" pitchFamily="34" charset="0"/>
                         </a:rPr>
-                        <a:t>Successful: </a:t>
+                        <a:t>: </a:t>
                       </a:r>
                       <a:r>
                         <a:rPr lang="en-GB" sz="1600" noProof="0" dirty="0">
-                          <a:latin typeface="Palatino Linotype" panose="02040502050505030304" pitchFamily="18" charset="0"/>
+                          <a:latin typeface="Aptos" panose="020B0004020202020204" pitchFamily="34" charset="0"/>
                         </a:rPr>
                         <a:t>the request was successfully received, understood, and accepted.</a:t>
                       </a:r>
                       <a:endParaRPr lang="en-US" sz="1600" noProof="0" dirty="0">
-                        <a:latin typeface="Palatino Linotype" panose="02040502050505030304" pitchFamily="18" charset="0"/>
+                        <a:latin typeface="Aptos" panose="020B0004020202020204" pitchFamily="34" charset="0"/>
                       </a:endParaRPr>
                     </a:p>
                   </a:txBody>
@@ -12845,7 +12865,7 @@
                     <a:p>
                       <a:r>
                         <a:rPr lang="en-US" sz="1600" b="1" noProof="0" dirty="0">
-                          <a:latin typeface="Palatino Linotype" panose="02040502050505030304" pitchFamily="18" charset="0"/>
+                          <a:latin typeface="Aptos" panose="020B0004020202020204" pitchFamily="34" charset="0"/>
                         </a:rPr>
                         <a:t>3xx</a:t>
                       </a:r>
@@ -12859,19 +12879,25 @@
                     <a:lstStyle/>
                     <a:p>
                       <a:r>
+                        <a:rPr lang="en-US" sz="1600" b="1" noProof="0" dirty="0">
+                          <a:latin typeface="Aptos" panose="020B0004020202020204" pitchFamily="34" charset="0"/>
+                        </a:rPr>
+                        <a:t>Redirecting</a:t>
+                      </a:r>
+                      <a:r>
                         <a:rPr lang="en-US" sz="1600" noProof="0" dirty="0">
-                          <a:latin typeface="Palatino Linotype" panose="02040502050505030304" pitchFamily="18" charset="0"/>
+                          <a:latin typeface="Aptos" panose="020B0004020202020204" pitchFamily="34" charset="0"/>
                         </a:rPr>
-                        <a:t>Redirecting: </a:t>
+                        <a:t>: </a:t>
                       </a:r>
                       <a:r>
                         <a:rPr lang="en-GB" sz="1600" noProof="0" dirty="0">
-                          <a:latin typeface="Palatino Linotype" panose="02040502050505030304" pitchFamily="18" charset="0"/>
+                          <a:latin typeface="Aptos" panose="020B0004020202020204" pitchFamily="34" charset="0"/>
                         </a:rPr>
                         <a:t>further action needs to be taken in order to complete the request.</a:t>
                       </a:r>
                       <a:endParaRPr lang="en-US" sz="1600" noProof="0" dirty="0">
-                        <a:latin typeface="Palatino Linotype" panose="02040502050505030304" pitchFamily="18" charset="0"/>
+                        <a:latin typeface="Aptos" panose="020B0004020202020204" pitchFamily="34" charset="0"/>
                       </a:endParaRPr>
                     </a:p>
                   </a:txBody>
@@ -12891,7 +12917,7 @@
                     <a:p>
                       <a:r>
                         <a:rPr lang="en-US" sz="1600" b="1" noProof="0" dirty="0">
-                          <a:latin typeface="Palatino Linotype" panose="02040502050505030304" pitchFamily="18" charset="0"/>
+                          <a:latin typeface="Aptos" panose="020B0004020202020204" pitchFamily="34" charset="0"/>
                         </a:rPr>
                         <a:t>4xx</a:t>
                       </a:r>
@@ -12905,25 +12931,37 @@
                     <a:lstStyle/>
                     <a:p>
                       <a:r>
-                        <a:rPr lang="en-US" sz="1600" noProof="0" dirty="0">
-                          <a:latin typeface="Palatino Linotype" panose="02040502050505030304" pitchFamily="18" charset="0"/>
+                        <a:rPr lang="en-US" sz="1600" b="1" noProof="0" dirty="0">
+                          <a:latin typeface="Aptos" panose="020B0004020202020204" pitchFamily="34" charset="0"/>
                         </a:rPr>
                         <a:t>Client</a:t>
                       </a:r>
                       <a:r>
                         <a:rPr lang="en-US" sz="1600" baseline="0" noProof="0" dirty="0">
-                          <a:latin typeface="Palatino Linotype" panose="02040502050505030304" pitchFamily="18" charset="0"/>
+                          <a:latin typeface="Aptos" panose="020B0004020202020204" pitchFamily="34" charset="0"/>
                         </a:rPr>
-                        <a:t> error: </a:t>
+                        <a:t> </a:t>
+                      </a:r>
+                      <a:r>
+                        <a:rPr lang="en-US" sz="1600" b="1" baseline="0" noProof="0" dirty="0">
+                          <a:latin typeface="Aptos" panose="020B0004020202020204" pitchFamily="34" charset="0"/>
+                        </a:rPr>
+                        <a:t>error</a:t>
+                      </a:r>
+                      <a:r>
+                        <a:rPr lang="en-US" sz="1600" baseline="0" noProof="0" dirty="0">
+                          <a:latin typeface="Aptos" panose="020B0004020202020204" pitchFamily="34" charset="0"/>
+                        </a:rPr>
+                        <a:t>: </a:t>
                       </a:r>
                       <a:r>
                         <a:rPr lang="en-GB" sz="1600" baseline="0" noProof="0" dirty="0">
-                          <a:latin typeface="Palatino Linotype" panose="02040502050505030304" pitchFamily="18" charset="0"/>
+                          <a:latin typeface="Aptos" panose="020B0004020202020204" pitchFamily="34" charset="0"/>
                         </a:rPr>
                         <a:t>the request contains bad syntax or cannot be fulfilled.</a:t>
                       </a:r>
                       <a:endParaRPr lang="en-US" sz="1600" noProof="0" dirty="0">
-                        <a:latin typeface="Palatino Linotype" panose="02040502050505030304" pitchFamily="18" charset="0"/>
+                        <a:latin typeface="Aptos" panose="020B0004020202020204" pitchFamily="34" charset="0"/>
                       </a:endParaRPr>
                     </a:p>
                   </a:txBody>
@@ -12943,7 +12981,7 @@
                     <a:p>
                       <a:r>
                         <a:rPr lang="en-US" sz="1600" b="1" noProof="0" dirty="0">
-                          <a:latin typeface="Palatino Linotype" panose="02040502050505030304" pitchFamily="18" charset="0"/>
+                          <a:latin typeface="Aptos" panose="020B0004020202020204" pitchFamily="34" charset="0"/>
                         </a:rPr>
                         <a:t>5xx</a:t>
                       </a:r>
@@ -12957,37 +12995,55 @@
                     <a:lstStyle/>
                     <a:p>
                       <a:r>
+                        <a:rPr lang="en-US" sz="1600" b="1" noProof="0" dirty="0">
+                          <a:latin typeface="Aptos" panose="020B0004020202020204" pitchFamily="34" charset="0"/>
+                        </a:rPr>
+                        <a:t>Server</a:t>
+                      </a:r>
+                      <a:r>
                         <a:rPr lang="en-US" sz="1600" noProof="0" dirty="0">
-                          <a:latin typeface="Palatino Linotype" panose="02040502050505030304" pitchFamily="18" charset="0"/>
+                          <a:latin typeface="Aptos" panose="020B0004020202020204" pitchFamily="34" charset="0"/>
                         </a:rPr>
-                        <a:t>Server error:</a:t>
+                        <a:t> </a:t>
+                      </a:r>
+                      <a:r>
+                        <a:rPr lang="en-US" sz="1600" b="1" noProof="0" dirty="0">
+                          <a:latin typeface="Aptos" panose="020B0004020202020204" pitchFamily="34" charset="0"/>
+                        </a:rPr>
+                        <a:t>error</a:t>
+                      </a:r>
+                      <a:r>
+                        <a:rPr lang="en-US" sz="1600" noProof="0" dirty="0">
+                          <a:latin typeface="Aptos" panose="020B0004020202020204" pitchFamily="34" charset="0"/>
+                        </a:rPr>
+                        <a:t>:</a:t>
                       </a:r>
                       <a:r>
                         <a:rPr lang="en-US" sz="1600" baseline="0" noProof="0" dirty="0">
-                          <a:latin typeface="Palatino Linotype" panose="02040502050505030304" pitchFamily="18" charset="0"/>
+                          <a:latin typeface="Aptos" panose="020B0004020202020204" pitchFamily="34" charset="0"/>
                         </a:rPr>
                         <a:t> </a:t>
                       </a:r>
                       <a:r>
                         <a:rPr lang="en-GB" sz="1600" baseline="0" noProof="0" dirty="0">
-                          <a:latin typeface="Palatino Linotype" panose="02040502050505030304" pitchFamily="18" charset="0"/>
+                          <a:latin typeface="Aptos" panose="020B0004020202020204" pitchFamily="34" charset="0"/>
                         </a:rPr>
                         <a:t>The server failed to </a:t>
                       </a:r>
                       <a:r>
                         <a:rPr lang="en-GB" sz="1600" baseline="0" noProof="0" dirty="0" err="1">
-                          <a:latin typeface="Palatino Linotype" panose="02040502050505030304" pitchFamily="18" charset="0"/>
+                          <a:latin typeface="Aptos" panose="020B0004020202020204" pitchFamily="34" charset="0"/>
                         </a:rPr>
                         <a:t>fulfill</a:t>
                       </a:r>
                       <a:r>
                         <a:rPr lang="en-GB" sz="1600" baseline="0" noProof="0" dirty="0">
-                          <a:latin typeface="Palatino Linotype" panose="02040502050505030304" pitchFamily="18" charset="0"/>
+                          <a:latin typeface="Aptos" panose="020B0004020202020204" pitchFamily="34" charset="0"/>
                         </a:rPr>
                         <a:t> an apparently valid request.</a:t>
                       </a:r>
                       <a:endParaRPr lang="en-US" sz="1600" noProof="0" dirty="0">
-                        <a:latin typeface="Palatino Linotype" panose="02040502050505030304" pitchFamily="18" charset="0"/>
+                        <a:latin typeface="Aptos" panose="020B0004020202020204" pitchFamily="34" charset="0"/>
                       </a:endParaRPr>
                     </a:p>
                   </a:txBody>
@@ -13432,7 +13488,7 @@
         </p:nvSpPr>
         <p:spPr>
           <a:xfrm>
-            <a:off x="9900745" y="325821"/>
+            <a:off x="10059772" y="297757"/>
             <a:ext cx="1975945" cy="588579"/>
           </a:xfrm>
           <a:prstGeom prst="rect">
